--- a/docs/semipresencial/SOM_presentacion.pptx
+++ b/docs/semipresencial/SOM_presentacion.pptx
@@ -4021,7 +4021,7 @@
                 <a:latin typeface="Calibri"/>
                 <a:ea typeface="Calibri"/>
               </a:rPr>
-              <a:t>Sistemas Operativos Monopuesto</a:t>
+              <a:t>Sistemas Operativos Monopuesto  ·  Luis Garcia Bonifaz</a:t>
             </a:r>
             <a:endParaRPr b="0" lang="es-ES" sz="900" spc="-1" strike="noStrike">
               <a:solidFill>
@@ -4086,6 +4086,40 @@
               </a:solidFill>
               <a:latin typeface="Arial"/>
             </a:endParaRPr>
+          </a:p>
+        </p:txBody>
+      </p:sp>
+      <p:sp>
+        <p:nvSpPr>
+          <p:cNvPr id="25" name="TextBox 24"/>
+          <p:cNvSpPr txBox="1"/>
+          <p:nvPr/>
+        </p:nvSpPr>
+        <p:spPr>
+          <a:xfrm>
+            <a:off x="822960" y="5960000"/>
+            <a:ext cx="9692280" cy="400000"/>
+          </a:xfrm>
+          <a:prstGeom prst="rect">
+            <a:avLst/>
+          </a:prstGeom>
+          <a:noFill/>
+        </p:spPr>
+        <p:txBody>
+          <a:bodyPr wrap="square">
+            <a:spAutoFit/>
+          </a:bodyPr>
+          <a:lstStyle/>
+          <a:p>
+            <a:r>
+              <a:rPr sz="1400" b="1">
+                <a:solidFill>
+                  <a:srgbClr val="FFFFFF"/>
+                </a:solidFill>
+                <a:latin typeface="Calibri"/>
+              </a:rPr>
+              <a:t>Luis Garcia Bonifaz  ·  l.garciabonifaz@edu.gva.es</a:t>
+            </a:r>
           </a:p>
         </p:txBody>
       </p:sp>
@@ -5570,7 +5604,7 @@
                 <a:latin typeface="Calibri"/>
                 <a:ea typeface="Calibri"/>
               </a:rPr>
-              <a:t>Sistemas Operativos Monopuesto</a:t>
+              <a:t>Sistemas Operativos Monopuesto  ·  Luis Garcia Bonifaz</a:t>
             </a:r>
             <a:endParaRPr b="0" lang="es-ES" sz="900" spc="-1" strike="noStrike">
               <a:solidFill>
@@ -6575,7 +6609,7 @@
                 <a:latin typeface="Calibri"/>
                 <a:ea typeface="Calibri"/>
               </a:rPr>
-              <a:t>Sistemas Operativos Monopuesto</a:t>
+              <a:t>Sistemas Operativos Monopuesto  ·  Luis Garcia Bonifaz</a:t>
             </a:r>
             <a:endParaRPr b="0" lang="es-ES" sz="900" spc="-1" strike="noStrike">
               <a:solidFill>
@@ -8148,7 +8182,7 @@
                 <a:latin typeface="Calibri"/>
                 <a:ea typeface="Calibri"/>
               </a:rPr>
-              <a:t>Sistemas Operativos Monopuesto</a:t>
+              <a:t>Sistemas Operativos Monopuesto  ·  Luis Garcia Bonifaz</a:t>
             </a:r>
             <a:endParaRPr b="0" lang="es-ES" sz="900" spc="-1" strike="noStrike">
               <a:solidFill>
@@ -9661,7 +9695,7 @@
                 <a:latin typeface="Calibri"/>
                 <a:ea typeface="Calibri"/>
               </a:rPr>
-              <a:t>Sistemas Operativos Monopuesto</a:t>
+              <a:t>Sistemas Operativos Monopuesto  ·  Luis Garcia Bonifaz</a:t>
             </a:r>
             <a:endParaRPr b="0" lang="es-ES" sz="900" spc="-1" strike="noStrike">
               <a:solidFill>
@@ -10589,7 +10623,7 @@
                 <a:latin typeface="Calibri"/>
                 <a:ea typeface="Calibri"/>
               </a:rPr>
-              <a:t>Sistemas Operativos Monopuesto</a:t>
+              <a:t>Sistemas Operativos Monopuesto  ·  Luis Garcia Bonifaz</a:t>
             </a:r>
             <a:endParaRPr b="0" lang="es-ES" sz="900" spc="-1" strike="noStrike">
               <a:solidFill>
@@ -12122,7 +12156,7 @@
                 <a:latin typeface="Calibri"/>
                 <a:ea typeface="Calibri"/>
               </a:rPr>
-              <a:t>Sistemas Operativos Monopuesto</a:t>
+              <a:t>Sistemas Operativos Monopuesto  ·  Luis Garcia Bonifaz</a:t>
             </a:r>
             <a:endParaRPr b="0" lang="es-ES" sz="900" spc="-1" strike="noStrike">
               <a:solidFill>
@@ -13713,7 +13747,7 @@
                 <a:latin typeface="Calibri"/>
                 <a:ea typeface="Calibri"/>
               </a:rPr>
-              <a:t>Sistemas Operativos Monopuesto</a:t>
+              <a:t>Sistemas Operativos Monopuesto  ·  Luis Garcia Bonifaz</a:t>
             </a:r>
             <a:endParaRPr b="0" lang="es-ES" sz="900" spc="-1" strike="noStrike">
               <a:solidFill>
@@ -14279,7 +14313,7 @@
                 <a:latin typeface="Calibri"/>
                 <a:ea typeface="Calibri"/>
               </a:rPr>
-              <a:t>Sistemas Operativos Monopuesto</a:t>
+              <a:t>Sistemas Operativos Monopuesto  ·  Luis Garcia Bonifaz</a:t>
             </a:r>
             <a:endParaRPr b="0" lang="es-ES" sz="900" spc="-1" strike="noStrike">
               <a:solidFill>
@@ -16010,7 +16044,7 @@
                 <a:latin typeface="Calibri"/>
                 <a:ea typeface="Calibri"/>
               </a:rPr>
-              <a:t>Sistemas Operativos Monopuesto</a:t>
+              <a:t>Sistemas Operativos Monopuesto  ·  Luis Garcia Bonifaz</a:t>
             </a:r>
             <a:endParaRPr b="0" lang="es-ES" sz="900" spc="-1" strike="noStrike">
               <a:solidFill>
@@ -17265,7 +17299,7 @@
                 <a:latin typeface="Calibri"/>
                 <a:ea typeface="Calibri"/>
               </a:rPr>
-              <a:t>Sistemas Operativos Monopuesto</a:t>
+              <a:t>Sistemas Operativos Monopuesto  ·  Luis Garcia Bonifaz</a:t>
             </a:r>
             <a:endParaRPr b="0" lang="es-ES" sz="900" spc="-1" strike="noStrike">
               <a:solidFill>
@@ -18566,7 +18600,7 @@
                 <a:latin typeface="Calibri"/>
                 <a:ea typeface="Calibri"/>
               </a:rPr>
-              <a:t>Sistemas Operativos Monopuesto</a:t>
+              <a:t>Sistemas Operativos Monopuesto  ·  Luis Garcia Bonifaz</a:t>
             </a:r>
             <a:endParaRPr b="0" lang="es-ES" sz="900" spc="-1" strike="noStrike">
               <a:solidFill>
@@ -19940,7 +19974,7 @@
                 <a:latin typeface="Calibri"/>
                 <a:ea typeface="Calibri"/>
               </a:rPr>
-              <a:t>Sistemas Operativos Monopuesto</a:t>
+              <a:t>Sistemas Operativos Monopuesto  ·  Luis Garcia Bonifaz</a:t>
             </a:r>
             <a:endParaRPr b="0" lang="es-ES" sz="900" spc="-1" strike="noStrike">
               <a:solidFill>
@@ -20205,7 +20239,7 @@
                 <a:latin typeface="Calibri"/>
                 <a:ea typeface="Calibri"/>
               </a:rPr>
-              <a:t>Sistemas Operativos Monopuesto</a:t>
+              <a:t>Sistemas Operativos Monopuesto  ·  Luis Garcia Bonifaz</a:t>
             </a:r>
             <a:endParaRPr b="0" lang="es-ES" sz="900" spc="-1" strike="noStrike">
               <a:solidFill>
@@ -21627,7 +21661,7 @@
                 <a:latin typeface="Calibri"/>
                 <a:ea typeface="Calibri"/>
               </a:rPr>
-              <a:t>Sistemas Operativos Monopuesto</a:t>
+              <a:t>Sistemas Operativos Monopuesto  ·  Luis Garcia Bonifaz</a:t>
             </a:r>
             <a:endParaRPr b="0" lang="es-ES" sz="900" spc="-1" strike="noStrike">
               <a:solidFill>
@@ -22679,7 +22713,7 @@
                 <a:latin typeface="Calibri"/>
                 <a:ea typeface="Calibri"/>
               </a:rPr>
-              <a:t>Sistemas Operativos Monopuesto</a:t>
+              <a:t>Sistemas Operativos Monopuesto  ·  Luis Garcia Bonifaz</a:t>
             </a:r>
             <a:endParaRPr b="0" lang="es-ES" sz="900" spc="-1" strike="noStrike">
               <a:solidFill>
@@ -23952,7 +23986,7 @@
                 <a:latin typeface="Calibri"/>
                 <a:ea typeface="Calibri"/>
               </a:rPr>
-              <a:t>Sistemas Operativos Monopuesto</a:t>
+              <a:t>Sistemas Operativos Monopuesto  ·  Luis Garcia Bonifaz</a:t>
             </a:r>
             <a:endParaRPr b="0" lang="es-ES" sz="900" spc="-1" strike="noStrike">
               <a:solidFill>
